--- a/Data Extraction/4-Data Extraction with Web Scraping.pptx
+++ b/Data Extraction/4-Data Extraction with Web Scraping.pptx
@@ -201,6 +201,9 @@
         </p14:section>
       </p14:sectionLst>
     </p:ext>
+    <p:ext uri="{EFAFB233-063F-42B5-8137-9DF3F51BA10A}">
+      <p15:sldGuideLst xmlns:p15="http://schemas.microsoft.com/office/powerpoint/2012/main"/>
+    </p:ext>
   </p:extLst>
 </p:presentation>
 </file>
@@ -287,7 +290,7 @@
           <a:p>
             <a:fld id="{77595C33-CE7A-4F97-A372-BE85B2DA220F}" type="datetimeFigureOut">
               <a:rPr lang="en-IN" smtClean="0"/>
-              <a:t>03-Oct-2024 Thu</a:t>
+              <a:t>04-Oct-2024 Fri</a:t>
             </a:fld>
             <a:endParaRPr lang="en-IN"/>
           </a:p>
@@ -3058,9 +3061,9 @@
           <a:bodyPr/>
           <a:lstStyle/>
           <a:p>
-            <a:fld id="{6444479B-705B-4489-957E-7E8A228BDFA0}" type="datetime1">
+            <a:fld id="{769254D7-D8C0-4AD0-97FA-FF9B2FB28C5E}" type="datetime1">
               <a:rPr lang="en-US" smtClean="0"/>
-              <a:t>10/3/2024</a:t>
+              <a:t>10/4/2024</a:t>
             </a:fld>
             <a:endParaRPr lang="en-US"/>
           </a:p>
@@ -3258,9 +3261,9 @@
           <a:bodyPr/>
           <a:lstStyle/>
           <a:p>
-            <a:fld id="{C07B66AD-7C08-490A-ADA4-B47E10FB2407}" type="datetime1">
+            <a:fld id="{E0096558-489F-4C22-854A-72D6022105B5}" type="datetime1">
               <a:rPr lang="en-US" smtClean="0"/>
-              <a:t>10/3/2024</a:t>
+              <a:t>10/4/2024</a:t>
             </a:fld>
             <a:endParaRPr lang="en-US"/>
           </a:p>
@@ -3517,9 +3520,9 @@
           <a:bodyPr/>
           <a:lstStyle/>
           <a:p>
-            <a:fld id="{05B95027-4255-49E7-9841-CD21BCC99996}" type="datetime1">
+            <a:fld id="{5E0F4E65-2EB9-4B1F-B7A4-C4BAE6C5EF1E}" type="datetime1">
               <a:rPr lang="en-US" smtClean="0"/>
-              <a:t>10/3/2024</a:t>
+              <a:t>10/4/2024</a:t>
             </a:fld>
             <a:endParaRPr lang="en-US"/>
           </a:p>
@@ -3758,9 +3761,9 @@
           <a:bodyPr/>
           <a:lstStyle/>
           <a:p>
-            <a:fld id="{9F89F774-3FA6-43B8-9241-99959C8FD463}" type="datetime1">
+            <a:fld id="{BC9ABE84-6D3A-4ACC-A2CF-53A65D86113A}" type="datetime1">
               <a:rPr lang="en-US" smtClean="0"/>
-              <a:t>10/3/2024</a:t>
+              <a:t>10/4/2024</a:t>
             </a:fld>
             <a:endParaRPr lang="en-US"/>
           </a:p>
@@ -4085,9 +4088,9 @@
           <a:bodyPr/>
           <a:lstStyle/>
           <a:p>
-            <a:fld id="{F9504452-5DCC-4FE2-A5C9-8A5EF6714D65}" type="datetime1">
+            <a:fld id="{EF6F389F-1D3C-4B5C-981B-687591D1744E}" type="datetime1">
               <a:rPr lang="en-US" smtClean="0"/>
-              <a:t>10/3/2024</a:t>
+              <a:t>10/4/2024</a:t>
             </a:fld>
             <a:endParaRPr lang="en-US"/>
           </a:p>
@@ -4395,9 +4398,9 @@
           <a:bodyPr/>
           <a:lstStyle/>
           <a:p>
-            <a:fld id="{E579ABC2-0180-4F3A-A895-A85BC724D472}" type="datetime1">
+            <a:fld id="{22CCB9F0-C407-4E92-8DC6-D696AAE294BF}" type="datetime1">
               <a:rPr lang="en-US" smtClean="0"/>
-              <a:t>10/3/2024</a:t>
+              <a:t>10/4/2024</a:t>
             </a:fld>
             <a:endParaRPr lang="en-US"/>
           </a:p>
@@ -4813,9 +4816,9 @@
           <a:bodyPr/>
           <a:lstStyle/>
           <a:p>
-            <a:fld id="{6AEEA9BA-4E8F-439E-BEA4-91FBA01E3F5F}" type="datetime1">
+            <a:fld id="{A607FD34-D757-489C-9C9F-CC732FC8EAC0}" type="datetime1">
               <a:rPr lang="en-US" smtClean="0"/>
-              <a:t>10/3/2024</a:t>
+              <a:t>10/4/2024</a:t>
             </a:fld>
             <a:endParaRPr lang="en-US"/>
           </a:p>
@@ -4955,9 +4958,9 @@
           <a:bodyPr/>
           <a:lstStyle/>
           <a:p>
-            <a:fld id="{BE15BF18-0007-481C-AA29-413124BC3EE7}" type="datetime1">
+            <a:fld id="{7BF23B3A-2E64-4926-919C-3228F686D1F4}" type="datetime1">
               <a:rPr lang="en-US" smtClean="0"/>
-              <a:t>10/3/2024</a:t>
+              <a:t>10/4/2024</a:t>
             </a:fld>
             <a:endParaRPr lang="en-US"/>
           </a:p>
@@ -5117,9 +5120,9 @@
           <a:bodyPr/>
           <a:lstStyle/>
           <a:p>
-            <a:fld id="{09BE9870-3748-43AD-B547-02A075CB4A1D}" type="datetime1">
+            <a:fld id="{C2E9DCE0-A113-4838-AD03-4C377365CB2C}" type="datetime1">
               <a:rPr lang="en-US" smtClean="0"/>
-              <a:t>10/3/2024</a:t>
+              <a:t>10/4/2024</a:t>
             </a:fld>
             <a:endParaRPr lang="en-US"/>
           </a:p>
@@ -5434,9 +5437,9 @@
           <a:bodyPr/>
           <a:lstStyle/>
           <a:p>
-            <a:fld id="{558E7897-33C5-4F1A-9307-D068E37F3DC7}" type="datetime1">
+            <a:fld id="{EFD3F2A0-6D83-4C94-AEA3-2063754E4CDD}" type="datetime1">
               <a:rPr lang="en-US" smtClean="0"/>
-              <a:t>10/3/2024</a:t>
+              <a:t>10/4/2024</a:t>
             </a:fld>
             <a:endParaRPr lang="en-US"/>
           </a:p>
@@ -5729,9 +5732,9 @@
           <a:bodyPr/>
           <a:lstStyle/>
           <a:p>
-            <a:fld id="{82E171BA-CC09-47C8-A6DF-F5C5CB59CEEC}" type="datetime1">
+            <a:fld id="{004A942B-24AB-41FE-9B24-77F99E4EE82B}" type="datetime1">
               <a:rPr lang="en-US" smtClean="0"/>
-              <a:t>10/3/2024</a:t>
+              <a:t>10/4/2024</a:t>
             </a:fld>
             <a:endParaRPr lang="en-US"/>
           </a:p>
@@ -5970,9 +5973,9 @@
             </a:lvl1pPr>
           </a:lstStyle>
           <a:p>
-            <a:fld id="{7DA38F49-B3E2-4BF0-BEC7-C30D34ABBB8D}" type="datetime1">
+            <a:fld id="{04FF8A6D-6898-462A-86D7-2395E0438B01}" type="datetime1">
               <a:rPr lang="en-US" smtClean="0"/>
-              <a:t>10/3/2024</a:t>
+              <a:t>10/4/2024</a:t>
             </a:fld>
             <a:endParaRPr lang="en-US"/>
           </a:p>
@@ -6127,7 +6130,7 @@
     <p:sldLayoutId id="2147483670" r:id="rId10"/>
     <p:sldLayoutId id="2147483671" r:id="rId11"/>
   </p:sldLayoutIdLst>
-  <p:hf sldNum="0" hdr="0" ftr="0" dt="0"/>
+  <p:hf hdr="0" ftr="0" dt="0"/>
   <p:txStyles>
     <p:titleStyle>
       <a:lvl1pPr algn="l" defTabSz="914400" rtl="0" eaLnBrk="1" latinLnBrk="0" hangingPunct="1">
@@ -6800,6 +6803,35 @@
           </a:fontRef>
         </p:style>
       </p:cxnSp>
+      <p:sp>
+        <p:nvSpPr>
+          <p:cNvPr id="5" name="Slide Number Placeholder 4">
+            <a:extLst>
+              <a:ext uri="{FF2B5EF4-FFF2-40B4-BE49-F238E27FC236}">
+                <a16:creationId xmlns:a16="http://schemas.microsoft.com/office/drawing/2014/main" id="{BD4CC69A-055B-6835-3E90-B211A7EB22AE}"/>
+              </a:ext>
+            </a:extLst>
+          </p:cNvPr>
+          <p:cNvSpPr>
+            <a:spLocks noGrp="1"/>
+          </p:cNvSpPr>
+          <p:nvPr>
+            <p:ph type="sldNum" sz="quarter" idx="12"/>
+          </p:nvPr>
+        </p:nvSpPr>
+        <p:spPr/>
+        <p:txBody>
+          <a:bodyPr/>
+          <a:lstStyle/>
+          <a:p>
+            <a:fld id="{70C12960-6E85-460F-B6E3-5B82CB31AF3D}" type="slidenum">
+              <a:rPr lang="en-US" smtClean="0"/>
+              <a:t>1</a:t>
+            </a:fld>
+            <a:endParaRPr lang="en-US"/>
+          </a:p>
+        </p:txBody>
+      </p:sp>
     </p:spTree>
     <p:extLst>
       <p:ext uri="{BB962C8B-B14F-4D97-AF65-F5344CB8AC3E}">
@@ -7390,6 +7422,35 @@
           </a:fontRef>
         </p:style>
       </p:cxnSp>
+      <p:sp>
+        <p:nvSpPr>
+          <p:cNvPr id="3" name="Slide Number Placeholder 2">
+            <a:extLst>
+              <a:ext uri="{FF2B5EF4-FFF2-40B4-BE49-F238E27FC236}">
+                <a16:creationId xmlns:a16="http://schemas.microsoft.com/office/drawing/2014/main" id="{5006401E-F94F-9661-693A-2BF212BAA732}"/>
+              </a:ext>
+            </a:extLst>
+          </p:cNvPr>
+          <p:cNvSpPr>
+            <a:spLocks noGrp="1"/>
+          </p:cNvSpPr>
+          <p:nvPr>
+            <p:ph type="sldNum" sz="quarter" idx="12"/>
+          </p:nvPr>
+        </p:nvSpPr>
+        <p:spPr/>
+        <p:txBody>
+          <a:bodyPr/>
+          <a:lstStyle/>
+          <a:p>
+            <a:fld id="{70C12960-6E85-460F-B6E3-5B82CB31AF3D}" type="slidenum">
+              <a:rPr lang="en-US" smtClean="0"/>
+              <a:t>10</a:t>
+            </a:fld>
+            <a:endParaRPr lang="en-US"/>
+          </a:p>
+        </p:txBody>
+      </p:sp>
     </p:spTree>
     <p:extLst>
       <p:ext uri="{BB962C8B-B14F-4D97-AF65-F5344CB8AC3E}">
@@ -7861,6 +7922,35 @@
               <a:t>Selenium is a popular tool for automating web browsers. It provides a simple and flexible way to automate repetitive tasks, such as testing and web scraping.</a:t>
             </a:r>
             <a:endParaRPr lang="en-IN" sz="1400"/>
+          </a:p>
+        </p:txBody>
+      </p:sp>
+      <p:sp>
+        <p:nvSpPr>
+          <p:cNvPr id="3" name="Slide Number Placeholder 2">
+            <a:extLst>
+              <a:ext uri="{FF2B5EF4-FFF2-40B4-BE49-F238E27FC236}">
+                <a16:creationId xmlns:a16="http://schemas.microsoft.com/office/drawing/2014/main" id="{C15E169B-8F90-F508-9334-2293820E9265}"/>
+              </a:ext>
+            </a:extLst>
+          </p:cNvPr>
+          <p:cNvSpPr>
+            <a:spLocks noGrp="1"/>
+          </p:cNvSpPr>
+          <p:nvPr>
+            <p:ph type="sldNum" sz="quarter" idx="12"/>
+          </p:nvPr>
+        </p:nvSpPr>
+        <p:spPr/>
+        <p:txBody>
+          <a:bodyPr/>
+          <a:lstStyle/>
+          <a:p>
+            <a:fld id="{70C12960-6E85-460F-B6E3-5B82CB31AF3D}" type="slidenum">
+              <a:rPr lang="en-US" smtClean="0"/>
+              <a:t>11</a:t>
+            </a:fld>
+            <a:endParaRPr lang="en-US"/>
           </a:p>
         </p:txBody>
       </p:sp>
@@ -8407,6 +8497,35 @@
           </a:p>
         </p:txBody>
       </p:sp>
+      <p:sp>
+        <p:nvSpPr>
+          <p:cNvPr id="3" name="Slide Number Placeholder 2">
+            <a:extLst>
+              <a:ext uri="{FF2B5EF4-FFF2-40B4-BE49-F238E27FC236}">
+                <a16:creationId xmlns:a16="http://schemas.microsoft.com/office/drawing/2014/main" id="{A33BCFB1-71B5-CE50-520E-66DC20225727}"/>
+              </a:ext>
+            </a:extLst>
+          </p:cNvPr>
+          <p:cNvSpPr>
+            <a:spLocks noGrp="1"/>
+          </p:cNvSpPr>
+          <p:nvPr>
+            <p:ph type="sldNum" sz="quarter" idx="12"/>
+          </p:nvPr>
+        </p:nvSpPr>
+        <p:spPr/>
+        <p:txBody>
+          <a:bodyPr/>
+          <a:lstStyle/>
+          <a:p>
+            <a:fld id="{70C12960-6E85-460F-B6E3-5B82CB31AF3D}" type="slidenum">
+              <a:rPr lang="en-US" smtClean="0"/>
+              <a:t>12</a:t>
+            </a:fld>
+            <a:endParaRPr lang="en-US"/>
+          </a:p>
+        </p:txBody>
+      </p:sp>
     </p:spTree>
     <p:extLst>
       <p:ext uri="{BB962C8B-B14F-4D97-AF65-F5344CB8AC3E}">
@@ -8927,6 +9046,35 @@
           </a:p>
         </p:txBody>
       </p:sp>
+      <p:sp>
+        <p:nvSpPr>
+          <p:cNvPr id="3" name="Slide Number Placeholder 2">
+            <a:extLst>
+              <a:ext uri="{FF2B5EF4-FFF2-40B4-BE49-F238E27FC236}">
+                <a16:creationId xmlns:a16="http://schemas.microsoft.com/office/drawing/2014/main" id="{96F0080E-D24E-350B-0758-1B5468EC07EB}"/>
+              </a:ext>
+            </a:extLst>
+          </p:cNvPr>
+          <p:cNvSpPr>
+            <a:spLocks noGrp="1"/>
+          </p:cNvSpPr>
+          <p:nvPr>
+            <p:ph type="sldNum" sz="quarter" idx="12"/>
+          </p:nvPr>
+        </p:nvSpPr>
+        <p:spPr/>
+        <p:txBody>
+          <a:bodyPr/>
+          <a:lstStyle/>
+          <a:p>
+            <a:fld id="{70C12960-6E85-460F-B6E3-5B82CB31AF3D}" type="slidenum">
+              <a:rPr lang="en-US" smtClean="0"/>
+              <a:t>13</a:t>
+            </a:fld>
+            <a:endParaRPr lang="en-US"/>
+          </a:p>
+        </p:txBody>
+      </p:sp>
     </p:spTree>
     <p:extLst>
       <p:ext uri="{BB962C8B-B14F-4D97-AF65-F5344CB8AC3E}">
@@ -9434,6 +9582,35 @@
           </a:fontRef>
         </p:style>
       </p:cxnSp>
+      <p:sp>
+        <p:nvSpPr>
+          <p:cNvPr id="3" name="Slide Number Placeholder 2">
+            <a:extLst>
+              <a:ext uri="{FF2B5EF4-FFF2-40B4-BE49-F238E27FC236}">
+                <a16:creationId xmlns:a16="http://schemas.microsoft.com/office/drawing/2014/main" id="{72E661DA-D7DA-6EC7-D657-A97F68178AD7}"/>
+              </a:ext>
+            </a:extLst>
+          </p:cNvPr>
+          <p:cNvSpPr>
+            <a:spLocks noGrp="1"/>
+          </p:cNvSpPr>
+          <p:nvPr>
+            <p:ph type="sldNum" sz="quarter" idx="12"/>
+          </p:nvPr>
+        </p:nvSpPr>
+        <p:spPr/>
+        <p:txBody>
+          <a:bodyPr/>
+          <a:lstStyle/>
+          <a:p>
+            <a:fld id="{70C12960-6E85-460F-B6E3-5B82CB31AF3D}" type="slidenum">
+              <a:rPr lang="en-US" smtClean="0"/>
+              <a:t>14</a:t>
+            </a:fld>
+            <a:endParaRPr lang="en-US"/>
+          </a:p>
+        </p:txBody>
+      </p:sp>
     </p:spTree>
     <p:extLst>
       <p:ext uri="{BB962C8B-B14F-4D97-AF65-F5344CB8AC3E}">
@@ -9889,6 +10066,35 @@
               <a:t>To comply with website terms of service, it is important to read and understand the terms before using the website. If web scraping is prohibited, it is important to avoid scraping the website to avoid legal repercussions.</a:t>
             </a:r>
             <a:endParaRPr lang="en-IN" sz="1400"/>
+          </a:p>
+        </p:txBody>
+      </p:sp>
+      <p:sp>
+        <p:nvSpPr>
+          <p:cNvPr id="3" name="Slide Number Placeholder 2">
+            <a:extLst>
+              <a:ext uri="{FF2B5EF4-FFF2-40B4-BE49-F238E27FC236}">
+                <a16:creationId xmlns:a16="http://schemas.microsoft.com/office/drawing/2014/main" id="{DB6A2240-F0DB-1791-0BAF-D6A5CBA810DE}"/>
+              </a:ext>
+            </a:extLst>
+          </p:cNvPr>
+          <p:cNvSpPr>
+            <a:spLocks noGrp="1"/>
+          </p:cNvSpPr>
+          <p:nvPr>
+            <p:ph type="sldNum" sz="quarter" idx="12"/>
+          </p:nvPr>
+        </p:nvSpPr>
+        <p:spPr/>
+        <p:txBody>
+          <a:bodyPr/>
+          <a:lstStyle/>
+          <a:p>
+            <a:fld id="{70C12960-6E85-460F-B6E3-5B82CB31AF3D}" type="slidenum">
+              <a:rPr lang="en-US" smtClean="0"/>
+              <a:t>15</a:t>
+            </a:fld>
+            <a:endParaRPr lang="en-US"/>
           </a:p>
         </p:txBody>
       </p:sp>
@@ -10372,6 +10578,35 @@
           </a:p>
         </p:txBody>
       </p:sp>
+      <p:sp>
+        <p:nvSpPr>
+          <p:cNvPr id="3" name="Slide Number Placeholder 2">
+            <a:extLst>
+              <a:ext uri="{FF2B5EF4-FFF2-40B4-BE49-F238E27FC236}">
+                <a16:creationId xmlns:a16="http://schemas.microsoft.com/office/drawing/2014/main" id="{AD9CF377-CEB6-2A8B-D837-25AA2EB7C1ED}"/>
+              </a:ext>
+            </a:extLst>
+          </p:cNvPr>
+          <p:cNvSpPr>
+            <a:spLocks noGrp="1"/>
+          </p:cNvSpPr>
+          <p:nvPr>
+            <p:ph type="sldNum" sz="quarter" idx="12"/>
+          </p:nvPr>
+        </p:nvSpPr>
+        <p:spPr/>
+        <p:txBody>
+          <a:bodyPr/>
+          <a:lstStyle/>
+          <a:p>
+            <a:fld id="{70C12960-6E85-460F-B6E3-5B82CB31AF3D}" type="slidenum">
+              <a:rPr lang="en-US" smtClean="0"/>
+              <a:t>16</a:t>
+            </a:fld>
+            <a:endParaRPr lang="en-US"/>
+          </a:p>
+        </p:txBody>
+      </p:sp>
     </p:spTree>
     <p:extLst>
       <p:ext uri="{BB962C8B-B14F-4D97-AF65-F5344CB8AC3E}">
@@ -10852,6 +11087,35 @@
           </a:p>
         </p:txBody>
       </p:sp>
+      <p:sp>
+        <p:nvSpPr>
+          <p:cNvPr id="3" name="Slide Number Placeholder 2">
+            <a:extLst>
+              <a:ext uri="{FF2B5EF4-FFF2-40B4-BE49-F238E27FC236}">
+                <a16:creationId xmlns:a16="http://schemas.microsoft.com/office/drawing/2014/main" id="{26E34A19-FD4C-C55B-0E48-1C4F44F9144C}"/>
+              </a:ext>
+            </a:extLst>
+          </p:cNvPr>
+          <p:cNvSpPr>
+            <a:spLocks noGrp="1"/>
+          </p:cNvSpPr>
+          <p:nvPr>
+            <p:ph type="sldNum" sz="quarter" idx="12"/>
+          </p:nvPr>
+        </p:nvSpPr>
+        <p:spPr/>
+        <p:txBody>
+          <a:bodyPr/>
+          <a:lstStyle/>
+          <a:p>
+            <a:fld id="{70C12960-6E85-460F-B6E3-5B82CB31AF3D}" type="slidenum">
+              <a:rPr lang="en-US" smtClean="0"/>
+              <a:t>17</a:t>
+            </a:fld>
+            <a:endParaRPr lang="en-US"/>
+          </a:p>
+        </p:txBody>
+      </p:sp>
     </p:spTree>
     <p:extLst>
       <p:ext uri="{BB962C8B-B14F-4D97-AF65-F5344CB8AC3E}">
@@ -11359,6 +11623,35 @@
           </a:fontRef>
         </p:style>
       </p:cxnSp>
+      <p:sp>
+        <p:nvSpPr>
+          <p:cNvPr id="3" name="Slide Number Placeholder 2">
+            <a:extLst>
+              <a:ext uri="{FF2B5EF4-FFF2-40B4-BE49-F238E27FC236}">
+                <a16:creationId xmlns:a16="http://schemas.microsoft.com/office/drawing/2014/main" id="{732E6F8B-5748-E983-1436-F2A55F98CFF4}"/>
+              </a:ext>
+            </a:extLst>
+          </p:cNvPr>
+          <p:cNvSpPr>
+            <a:spLocks noGrp="1"/>
+          </p:cNvSpPr>
+          <p:nvPr>
+            <p:ph type="sldNum" sz="quarter" idx="12"/>
+          </p:nvPr>
+        </p:nvSpPr>
+        <p:spPr/>
+        <p:txBody>
+          <a:bodyPr/>
+          <a:lstStyle/>
+          <a:p>
+            <a:fld id="{70C12960-6E85-460F-B6E3-5B82CB31AF3D}" type="slidenum">
+              <a:rPr lang="en-US" smtClean="0"/>
+              <a:t>18</a:t>
+            </a:fld>
+            <a:endParaRPr lang="en-US"/>
+          </a:p>
+        </p:txBody>
+      </p:sp>
     </p:spTree>
     <p:extLst>
       <p:ext uri="{BB962C8B-B14F-4D97-AF65-F5344CB8AC3E}">
@@ -11859,6 +12152,35 @@
               <a:t>AntiCaptcha is another CAPTCHA management tool that automates the process of solving CAPTCHAs. It is fast, reliable and supports a wide range of CAPTCHA types and APIs, making it suitable for various web applications.</a:t>
             </a:r>
             <a:endParaRPr lang="en-IN" sz="1400"/>
+          </a:p>
+        </p:txBody>
+      </p:sp>
+      <p:sp>
+        <p:nvSpPr>
+          <p:cNvPr id="3" name="Slide Number Placeholder 2">
+            <a:extLst>
+              <a:ext uri="{FF2B5EF4-FFF2-40B4-BE49-F238E27FC236}">
+                <a16:creationId xmlns:a16="http://schemas.microsoft.com/office/drawing/2014/main" id="{6C3052CF-DC7D-CE11-FF90-47B52A5096E2}"/>
+              </a:ext>
+            </a:extLst>
+          </p:cNvPr>
+          <p:cNvSpPr>
+            <a:spLocks noGrp="1"/>
+          </p:cNvSpPr>
+          <p:nvPr>
+            <p:ph type="sldNum" sz="quarter" idx="12"/>
+          </p:nvPr>
+        </p:nvSpPr>
+        <p:spPr/>
+        <p:txBody>
+          <a:bodyPr/>
+          <a:lstStyle/>
+          <a:p>
+            <a:fld id="{70C12960-6E85-460F-B6E3-5B82CB31AF3D}" type="slidenum">
+              <a:rPr lang="en-US" smtClean="0"/>
+              <a:t>19</a:t>
+            </a:fld>
+            <a:endParaRPr lang="en-US"/>
           </a:p>
         </p:txBody>
       </p:sp>
@@ -12350,6 +12672,35 @@
           </a:p>
         </p:txBody>
       </p:sp>
+      <p:sp>
+        <p:nvSpPr>
+          <p:cNvPr id="3" name="Slide Number Placeholder 2">
+            <a:extLst>
+              <a:ext uri="{FF2B5EF4-FFF2-40B4-BE49-F238E27FC236}">
+                <a16:creationId xmlns:a16="http://schemas.microsoft.com/office/drawing/2014/main" id="{E62F9016-F0A0-AA29-5236-DF6C464D6595}"/>
+              </a:ext>
+            </a:extLst>
+          </p:cNvPr>
+          <p:cNvSpPr>
+            <a:spLocks noGrp="1"/>
+          </p:cNvSpPr>
+          <p:nvPr>
+            <p:ph type="sldNum" sz="quarter" idx="12"/>
+          </p:nvPr>
+        </p:nvSpPr>
+        <p:spPr/>
+        <p:txBody>
+          <a:bodyPr/>
+          <a:lstStyle/>
+          <a:p>
+            <a:fld id="{70C12960-6E85-460F-B6E3-5B82CB31AF3D}" type="slidenum">
+              <a:rPr lang="en-US" smtClean="0"/>
+              <a:t>2</a:t>
+            </a:fld>
+            <a:endParaRPr lang="en-US"/>
+          </a:p>
+        </p:txBody>
+      </p:sp>
     </p:spTree>
     <p:extLst>
       <p:ext uri="{BB962C8B-B14F-4D97-AF65-F5344CB8AC3E}">
@@ -12854,6 +13205,35 @@
           </a:p>
         </p:txBody>
       </p:sp>
+      <p:sp>
+        <p:nvSpPr>
+          <p:cNvPr id="3" name="Slide Number Placeholder 2">
+            <a:extLst>
+              <a:ext uri="{FF2B5EF4-FFF2-40B4-BE49-F238E27FC236}">
+                <a16:creationId xmlns:a16="http://schemas.microsoft.com/office/drawing/2014/main" id="{7C6D8E46-5BCF-291B-359F-203EAE775F9B}"/>
+              </a:ext>
+            </a:extLst>
+          </p:cNvPr>
+          <p:cNvSpPr>
+            <a:spLocks noGrp="1"/>
+          </p:cNvSpPr>
+          <p:nvPr>
+            <p:ph type="sldNum" sz="quarter" idx="12"/>
+          </p:nvPr>
+        </p:nvSpPr>
+        <p:spPr/>
+        <p:txBody>
+          <a:bodyPr/>
+          <a:lstStyle/>
+          <a:p>
+            <a:fld id="{70C12960-6E85-460F-B6E3-5B82CB31AF3D}" type="slidenum">
+              <a:rPr lang="en-US" smtClean="0"/>
+              <a:t>20</a:t>
+            </a:fld>
+            <a:endParaRPr lang="en-US"/>
+          </a:p>
+        </p:txBody>
+      </p:sp>
     </p:spTree>
     <p:extLst>
       <p:ext uri="{BB962C8B-B14F-4D97-AF65-F5344CB8AC3E}">
@@ -13361,6 +13741,35 @@
           </a:fontRef>
         </p:style>
       </p:cxnSp>
+      <p:sp>
+        <p:nvSpPr>
+          <p:cNvPr id="3" name="Slide Number Placeholder 2">
+            <a:extLst>
+              <a:ext uri="{FF2B5EF4-FFF2-40B4-BE49-F238E27FC236}">
+                <a16:creationId xmlns:a16="http://schemas.microsoft.com/office/drawing/2014/main" id="{E2E1B40B-FA78-D9FF-7BE0-8E0C9909152B}"/>
+              </a:ext>
+            </a:extLst>
+          </p:cNvPr>
+          <p:cNvSpPr>
+            <a:spLocks noGrp="1"/>
+          </p:cNvSpPr>
+          <p:nvPr>
+            <p:ph type="sldNum" sz="quarter" idx="12"/>
+          </p:nvPr>
+        </p:nvSpPr>
+        <p:spPr/>
+        <p:txBody>
+          <a:bodyPr/>
+          <a:lstStyle/>
+          <a:p>
+            <a:fld id="{70C12960-6E85-460F-B6E3-5B82CB31AF3D}" type="slidenum">
+              <a:rPr lang="en-US" smtClean="0"/>
+              <a:t>21</a:t>
+            </a:fld>
+            <a:endParaRPr lang="en-US"/>
+          </a:p>
+        </p:txBody>
+      </p:sp>
     </p:spTree>
     <p:extLst>
       <p:ext uri="{BB962C8B-B14F-4D97-AF65-F5344CB8AC3E}">
@@ -13787,6 +14196,35 @@
               <a:t>Scraped data can be stored in various formats such as CSV, JSON, or databases depending on the nature of the data and the intended use.</a:t>
             </a:r>
             <a:endParaRPr lang="en-IN" sz="1400"/>
+          </a:p>
+        </p:txBody>
+      </p:sp>
+      <p:sp>
+        <p:nvSpPr>
+          <p:cNvPr id="3" name="Slide Number Placeholder 2">
+            <a:extLst>
+              <a:ext uri="{FF2B5EF4-FFF2-40B4-BE49-F238E27FC236}">
+                <a16:creationId xmlns:a16="http://schemas.microsoft.com/office/drawing/2014/main" id="{9D25F586-89FA-783B-A192-9ED2681C830F}"/>
+              </a:ext>
+            </a:extLst>
+          </p:cNvPr>
+          <p:cNvSpPr>
+            <a:spLocks noGrp="1"/>
+          </p:cNvSpPr>
+          <p:nvPr>
+            <p:ph type="sldNum" sz="quarter" idx="12"/>
+          </p:nvPr>
+        </p:nvSpPr>
+        <p:spPr/>
+        <p:txBody>
+          <a:bodyPr/>
+          <a:lstStyle/>
+          <a:p>
+            <a:fld id="{70C12960-6E85-460F-B6E3-5B82CB31AF3D}" type="slidenum">
+              <a:rPr lang="en-US" smtClean="0"/>
+              <a:t>22</a:t>
+            </a:fld>
+            <a:endParaRPr lang="en-US"/>
           </a:p>
         </p:txBody>
       </p:sp>
@@ -14270,6 +14708,35 @@
           </a:p>
         </p:txBody>
       </p:sp>
+      <p:sp>
+        <p:nvSpPr>
+          <p:cNvPr id="3" name="Slide Number Placeholder 2">
+            <a:extLst>
+              <a:ext uri="{FF2B5EF4-FFF2-40B4-BE49-F238E27FC236}">
+                <a16:creationId xmlns:a16="http://schemas.microsoft.com/office/drawing/2014/main" id="{6D12F99B-CAF3-A22A-5D55-6B2A60C80C1B}"/>
+              </a:ext>
+            </a:extLst>
+          </p:cNvPr>
+          <p:cNvSpPr>
+            <a:spLocks noGrp="1"/>
+          </p:cNvSpPr>
+          <p:nvPr>
+            <p:ph type="sldNum" sz="quarter" idx="12"/>
+          </p:nvPr>
+        </p:nvSpPr>
+        <p:spPr/>
+        <p:txBody>
+          <a:bodyPr/>
+          <a:lstStyle/>
+          <a:p>
+            <a:fld id="{70C12960-6E85-460F-B6E3-5B82CB31AF3D}" type="slidenum">
+              <a:rPr lang="en-US" smtClean="0"/>
+              <a:t>23</a:t>
+            </a:fld>
+            <a:endParaRPr lang="en-US"/>
+          </a:p>
+        </p:txBody>
+      </p:sp>
     </p:spTree>
     <p:extLst>
       <p:ext uri="{BB962C8B-B14F-4D97-AF65-F5344CB8AC3E}">
@@ -14777,6 +15244,35 @@
           </a:fontRef>
         </p:style>
       </p:cxnSp>
+      <p:sp>
+        <p:nvSpPr>
+          <p:cNvPr id="3" name="Slide Number Placeholder 2">
+            <a:extLst>
+              <a:ext uri="{FF2B5EF4-FFF2-40B4-BE49-F238E27FC236}">
+                <a16:creationId xmlns:a16="http://schemas.microsoft.com/office/drawing/2014/main" id="{CACEE661-EB5F-B32A-7101-3C8DCB12A787}"/>
+              </a:ext>
+            </a:extLst>
+          </p:cNvPr>
+          <p:cNvSpPr>
+            <a:spLocks noGrp="1"/>
+          </p:cNvSpPr>
+          <p:nvPr>
+            <p:ph type="sldNum" sz="quarter" idx="12"/>
+          </p:nvPr>
+        </p:nvSpPr>
+        <p:spPr/>
+        <p:txBody>
+          <a:bodyPr/>
+          <a:lstStyle/>
+          <a:p>
+            <a:fld id="{70C12960-6E85-460F-B6E3-5B82CB31AF3D}" type="slidenum">
+              <a:rPr lang="en-US" smtClean="0"/>
+              <a:t>24</a:t>
+            </a:fld>
+            <a:endParaRPr lang="en-US"/>
+          </a:p>
+        </p:txBody>
+      </p:sp>
     </p:spTree>
     <p:extLst>
       <p:ext uri="{BB962C8B-B14F-4D97-AF65-F5344CB8AC3E}">
@@ -15208,6 +15704,35 @@
               <a:t>Distributed scraping and parallel processing can significantly increase the speed of large-scale scraping jobs. This involves using multiple machines to scrape data in parallel, which can lead to faster data retrieval and more efficient processing.</a:t>
             </a:r>
             <a:endParaRPr lang="en-IN" sz="1400"/>
+          </a:p>
+        </p:txBody>
+      </p:sp>
+      <p:sp>
+        <p:nvSpPr>
+          <p:cNvPr id="3" name="Slide Number Placeholder 2">
+            <a:extLst>
+              <a:ext uri="{FF2B5EF4-FFF2-40B4-BE49-F238E27FC236}">
+                <a16:creationId xmlns:a16="http://schemas.microsoft.com/office/drawing/2014/main" id="{CC6F7533-7ADC-5E4B-0F4C-7EC4B596F3C5}"/>
+              </a:ext>
+            </a:extLst>
+          </p:cNvPr>
+          <p:cNvSpPr>
+            <a:spLocks noGrp="1"/>
+          </p:cNvSpPr>
+          <p:nvPr>
+            <p:ph type="sldNum" sz="quarter" idx="12"/>
+          </p:nvPr>
+        </p:nvSpPr>
+        <p:spPr/>
+        <p:txBody>
+          <a:bodyPr/>
+          <a:lstStyle/>
+          <a:p>
+            <a:fld id="{70C12960-6E85-460F-B6E3-5B82CB31AF3D}" type="slidenum">
+              <a:rPr lang="en-US" smtClean="0"/>
+              <a:t>25</a:t>
+            </a:fld>
+            <a:endParaRPr lang="en-US"/>
           </a:p>
         </p:txBody>
       </p:sp>
@@ -15691,6 +16216,35 @@
           </a:p>
         </p:txBody>
       </p:sp>
+      <p:sp>
+        <p:nvSpPr>
+          <p:cNvPr id="3" name="Slide Number Placeholder 2">
+            <a:extLst>
+              <a:ext uri="{FF2B5EF4-FFF2-40B4-BE49-F238E27FC236}">
+                <a16:creationId xmlns:a16="http://schemas.microsoft.com/office/drawing/2014/main" id="{048594CE-60EF-C416-D336-84C31F56D74F}"/>
+              </a:ext>
+            </a:extLst>
+          </p:cNvPr>
+          <p:cNvSpPr>
+            <a:spLocks noGrp="1"/>
+          </p:cNvSpPr>
+          <p:nvPr>
+            <p:ph type="sldNum" sz="quarter" idx="12"/>
+          </p:nvPr>
+        </p:nvSpPr>
+        <p:spPr/>
+        <p:txBody>
+          <a:bodyPr/>
+          <a:lstStyle/>
+          <a:p>
+            <a:fld id="{70C12960-6E85-460F-B6E3-5B82CB31AF3D}" type="slidenum">
+              <a:rPr lang="en-US" smtClean="0"/>
+              <a:t>26</a:t>
+            </a:fld>
+            <a:endParaRPr lang="en-US"/>
+          </a:p>
+        </p:txBody>
+      </p:sp>
     </p:spTree>
     <p:extLst>
       <p:ext uri="{BB962C8B-B14F-4D97-AF65-F5344CB8AC3E}">
@@ -16052,6 +16606,35 @@
               <a:t>By using web scraping techniques, tools and ethical practices, businesses can extract valuable data insights and make informed decisions based on that data to stay ahead of the competition.</a:t>
             </a:r>
             <a:endParaRPr lang="en-IN" sz="1400"/>
+          </a:p>
+        </p:txBody>
+      </p:sp>
+      <p:sp>
+        <p:nvSpPr>
+          <p:cNvPr id="4" name="Slide Number Placeholder 3">
+            <a:extLst>
+              <a:ext uri="{FF2B5EF4-FFF2-40B4-BE49-F238E27FC236}">
+                <a16:creationId xmlns:a16="http://schemas.microsoft.com/office/drawing/2014/main" id="{B3756DF1-3263-AD26-91CA-E8B10D72E2DB}"/>
+              </a:ext>
+            </a:extLst>
+          </p:cNvPr>
+          <p:cNvSpPr>
+            <a:spLocks noGrp="1"/>
+          </p:cNvSpPr>
+          <p:nvPr>
+            <p:ph type="sldNum" sz="quarter" idx="12"/>
+          </p:nvPr>
+        </p:nvSpPr>
+        <p:spPr/>
+        <p:txBody>
+          <a:bodyPr/>
+          <a:lstStyle/>
+          <a:p>
+            <a:fld id="{70C12960-6E85-460F-B6E3-5B82CB31AF3D}" type="slidenum">
+              <a:rPr lang="en-US" smtClean="0"/>
+              <a:t>27</a:t>
+            </a:fld>
+            <a:endParaRPr lang="en-US"/>
           </a:p>
         </p:txBody>
       </p:sp>
@@ -16562,6 +17145,35 @@
           </a:fontRef>
         </p:style>
       </p:cxnSp>
+      <p:sp>
+        <p:nvSpPr>
+          <p:cNvPr id="3" name="Slide Number Placeholder 2">
+            <a:extLst>
+              <a:ext uri="{FF2B5EF4-FFF2-40B4-BE49-F238E27FC236}">
+                <a16:creationId xmlns:a16="http://schemas.microsoft.com/office/drawing/2014/main" id="{25A2C9EC-AAC9-055D-31D6-D1C7C7AC5AE6}"/>
+              </a:ext>
+            </a:extLst>
+          </p:cNvPr>
+          <p:cNvSpPr>
+            <a:spLocks noGrp="1"/>
+          </p:cNvSpPr>
+          <p:nvPr>
+            <p:ph type="sldNum" sz="quarter" idx="12"/>
+          </p:nvPr>
+        </p:nvSpPr>
+        <p:spPr/>
+        <p:txBody>
+          <a:bodyPr/>
+          <a:lstStyle/>
+          <a:p>
+            <a:fld id="{70C12960-6E85-460F-B6E3-5B82CB31AF3D}" type="slidenum">
+              <a:rPr lang="en-US" smtClean="0"/>
+              <a:t>3</a:t>
+            </a:fld>
+            <a:endParaRPr lang="en-US"/>
+          </a:p>
+        </p:txBody>
+      </p:sp>
     </p:spTree>
     <p:extLst>
       <p:ext uri="{BB962C8B-B14F-4D97-AF65-F5344CB8AC3E}">
@@ -17017,6 +17629,35 @@
               <a:t>Web scraping has various applications, including market research, competitive analysis, and content aggregation. It can be used to gather data on products, prices, and customer reviews, among other things.</a:t>
             </a:r>
             <a:endParaRPr lang="en-IN" sz="1400"/>
+          </a:p>
+        </p:txBody>
+      </p:sp>
+      <p:sp>
+        <p:nvSpPr>
+          <p:cNvPr id="3" name="Slide Number Placeholder 2">
+            <a:extLst>
+              <a:ext uri="{FF2B5EF4-FFF2-40B4-BE49-F238E27FC236}">
+                <a16:creationId xmlns:a16="http://schemas.microsoft.com/office/drawing/2014/main" id="{EE3D15AC-7D9F-78F0-A68A-97693B69B330}"/>
+              </a:ext>
+            </a:extLst>
+          </p:cNvPr>
+          <p:cNvSpPr>
+            <a:spLocks noGrp="1"/>
+          </p:cNvSpPr>
+          <p:nvPr>
+            <p:ph type="sldNum" sz="quarter" idx="12"/>
+          </p:nvPr>
+        </p:nvSpPr>
+        <p:spPr/>
+        <p:txBody>
+          <a:bodyPr/>
+          <a:lstStyle/>
+          <a:p>
+            <a:fld id="{70C12960-6E85-460F-B6E3-5B82CB31AF3D}" type="slidenum">
+              <a:rPr lang="en-US" smtClean="0"/>
+              <a:t>4</a:t>
+            </a:fld>
+            <a:endParaRPr lang="en-US"/>
           </a:p>
         </p:txBody>
       </p:sp>
@@ -17540,6 +18181,35 @@
           </a:p>
         </p:txBody>
       </p:sp>
+      <p:sp>
+        <p:nvSpPr>
+          <p:cNvPr id="3" name="Slide Number Placeholder 2">
+            <a:extLst>
+              <a:ext uri="{FF2B5EF4-FFF2-40B4-BE49-F238E27FC236}">
+                <a16:creationId xmlns:a16="http://schemas.microsoft.com/office/drawing/2014/main" id="{C8BD239C-FBC4-1548-E6BB-8C34551F2E01}"/>
+              </a:ext>
+            </a:extLst>
+          </p:cNvPr>
+          <p:cNvSpPr>
+            <a:spLocks noGrp="1"/>
+          </p:cNvSpPr>
+          <p:nvPr>
+            <p:ph type="sldNum" sz="quarter" idx="12"/>
+          </p:nvPr>
+        </p:nvSpPr>
+        <p:spPr/>
+        <p:txBody>
+          <a:bodyPr/>
+          <a:lstStyle/>
+          <a:p>
+            <a:fld id="{70C12960-6E85-460F-B6E3-5B82CB31AF3D}" type="slidenum">
+              <a:rPr lang="en-US" smtClean="0"/>
+              <a:t>5</a:t>
+            </a:fld>
+            <a:endParaRPr lang="en-US"/>
+          </a:p>
+        </p:txBody>
+      </p:sp>
     </p:spTree>
     <p:extLst>
       <p:ext uri="{BB962C8B-B14F-4D97-AF65-F5344CB8AC3E}">
@@ -18047,6 +18717,35 @@
           </a:fontRef>
         </p:style>
       </p:cxnSp>
+      <p:sp>
+        <p:nvSpPr>
+          <p:cNvPr id="3" name="Slide Number Placeholder 2">
+            <a:extLst>
+              <a:ext uri="{FF2B5EF4-FFF2-40B4-BE49-F238E27FC236}">
+                <a16:creationId xmlns:a16="http://schemas.microsoft.com/office/drawing/2014/main" id="{90BA8A2E-6993-B829-561C-AC52C0B72278}"/>
+              </a:ext>
+            </a:extLst>
+          </p:cNvPr>
+          <p:cNvSpPr>
+            <a:spLocks noGrp="1"/>
+          </p:cNvSpPr>
+          <p:nvPr>
+            <p:ph type="sldNum" sz="quarter" idx="12"/>
+          </p:nvPr>
+        </p:nvSpPr>
+        <p:spPr/>
+        <p:txBody>
+          <a:bodyPr/>
+          <a:lstStyle/>
+          <a:p>
+            <a:fld id="{70C12960-6E85-460F-B6E3-5B82CB31AF3D}" type="slidenum">
+              <a:rPr lang="en-US" smtClean="0"/>
+              <a:t>6</a:t>
+            </a:fld>
+            <a:endParaRPr lang="en-US"/>
+          </a:p>
+        </p:txBody>
+      </p:sp>
     </p:spTree>
     <p:extLst>
       <p:ext uri="{BB962C8B-B14F-4D97-AF65-F5344CB8AC3E}">
@@ -18473,6 +19172,35 @@
               <a:t>Parsing HTML involves analyzing the structure of web pages to extract relevant data. This is done by identifying the relevant HTML tags and attributes, and using tools and libraries to parse and extract the data.</a:t>
             </a:r>
             <a:endParaRPr lang="en-IN" sz="1400"/>
+          </a:p>
+        </p:txBody>
+      </p:sp>
+      <p:sp>
+        <p:nvSpPr>
+          <p:cNvPr id="3" name="Slide Number Placeholder 2">
+            <a:extLst>
+              <a:ext uri="{FF2B5EF4-FFF2-40B4-BE49-F238E27FC236}">
+                <a16:creationId xmlns:a16="http://schemas.microsoft.com/office/drawing/2014/main" id="{B1665A87-5024-4355-D550-E7E01C48184A}"/>
+              </a:ext>
+            </a:extLst>
+          </p:cNvPr>
+          <p:cNvSpPr>
+            <a:spLocks noGrp="1"/>
+          </p:cNvSpPr>
+          <p:nvPr>
+            <p:ph type="sldNum" sz="quarter" idx="12"/>
+          </p:nvPr>
+        </p:nvSpPr>
+        <p:spPr/>
+        <p:txBody>
+          <a:bodyPr/>
+          <a:lstStyle/>
+          <a:p>
+            <a:fld id="{70C12960-6E85-460F-B6E3-5B82CB31AF3D}" type="slidenum">
+              <a:rPr lang="en-US" smtClean="0"/>
+              <a:t>7</a:t>
+            </a:fld>
+            <a:endParaRPr lang="en-US"/>
           </a:p>
         </p:txBody>
       </p:sp>
@@ -19019,6 +19747,35 @@
           </a:p>
         </p:txBody>
       </p:sp>
+      <p:sp>
+        <p:nvSpPr>
+          <p:cNvPr id="3" name="Slide Number Placeholder 2">
+            <a:extLst>
+              <a:ext uri="{FF2B5EF4-FFF2-40B4-BE49-F238E27FC236}">
+                <a16:creationId xmlns:a16="http://schemas.microsoft.com/office/drawing/2014/main" id="{270B45DE-D64F-9639-AB5C-9288FC03751E}"/>
+              </a:ext>
+            </a:extLst>
+          </p:cNvPr>
+          <p:cNvSpPr>
+            <a:spLocks noGrp="1"/>
+          </p:cNvSpPr>
+          <p:nvPr>
+            <p:ph type="sldNum" sz="quarter" idx="12"/>
+          </p:nvPr>
+        </p:nvSpPr>
+        <p:spPr/>
+        <p:txBody>
+          <a:bodyPr/>
+          <a:lstStyle/>
+          <a:p>
+            <a:fld id="{70C12960-6E85-460F-B6E3-5B82CB31AF3D}" type="slidenum">
+              <a:rPr lang="en-US" smtClean="0"/>
+              <a:t>8</a:t>
+            </a:fld>
+            <a:endParaRPr lang="en-US"/>
+          </a:p>
+        </p:txBody>
+      </p:sp>
     </p:spTree>
     <p:extLst>
       <p:ext uri="{BB962C8B-B14F-4D97-AF65-F5344CB8AC3E}">
@@ -19491,6 +20248,35 @@
               <a:t>Dynamic content on websites is content that is generated by JavaScript or other scripting languages. Handling dynamic content involves the use of tools like Selenium to interact with the website and extract the desired data.</a:t>
             </a:r>
             <a:endParaRPr lang="en-IN" sz="1400"/>
+          </a:p>
+        </p:txBody>
+      </p:sp>
+      <p:sp>
+        <p:nvSpPr>
+          <p:cNvPr id="3" name="Slide Number Placeholder 2">
+            <a:extLst>
+              <a:ext uri="{FF2B5EF4-FFF2-40B4-BE49-F238E27FC236}">
+                <a16:creationId xmlns:a16="http://schemas.microsoft.com/office/drawing/2014/main" id="{9DE42F84-0758-00B5-D4AC-64BE2DE7CF40}"/>
+              </a:ext>
+            </a:extLst>
+          </p:cNvPr>
+          <p:cNvSpPr>
+            <a:spLocks noGrp="1"/>
+          </p:cNvSpPr>
+          <p:nvPr>
+            <p:ph type="sldNum" sz="quarter" idx="12"/>
+          </p:nvPr>
+        </p:nvSpPr>
+        <p:spPr/>
+        <p:txBody>
+          <a:bodyPr/>
+          <a:lstStyle/>
+          <a:p>
+            <a:fld id="{70C12960-6E85-460F-B6E3-5B82CB31AF3D}" type="slidenum">
+              <a:rPr lang="en-US" smtClean="0"/>
+              <a:t>9</a:t>
+            </a:fld>
+            <a:endParaRPr lang="en-US"/>
           </a:p>
         </p:txBody>
       </p:sp>
